--- a/Presentation.pptx
+++ b/Presentation.pptx
@@ -16,25 +16,28 @@
     <p:sldId id="264" r:id="rId14"/>
     <p:sldId id="265" r:id="rId15"/>
     <p:sldId id="266" r:id="rId16"/>
+    <p:sldId id="267" r:id="rId17"/>
+    <p:sldId id="268" r:id="rId18"/>
+    <p:sldId id="269" r:id="rId19"/>
   </p:sldIdLst>
   <p:sldSz cx="18288000" cy="10287000"/>
   <p:notesSz cx="6858000" cy="9144000"/>
   <p:embeddedFontLst>
     <p:embeddedFont>
       <p:font typeface="Stinger Wide Bold" charset="1" panose="00000800000000000000"/>
-      <p:regular r:id="rId17"/>
+      <p:regular r:id="rId20"/>
     </p:embeddedFont>
     <p:embeddedFont>
       <p:font typeface="Codec Pro Bold" charset="1" panose="00000600000000000000"/>
-      <p:regular r:id="rId18"/>
+      <p:regular r:id="rId21"/>
     </p:embeddedFont>
     <p:embeddedFont>
       <p:font typeface="Codec Pro" charset="1" panose="00000500000000000000"/>
-      <p:regular r:id="rId19"/>
+      <p:regular r:id="rId22"/>
     </p:embeddedFont>
     <p:embeddedFont>
       <p:font typeface="Stinger Wide" charset="1" panose="00000500000000000000"/>
-      <p:regular r:id="rId20"/>
+      <p:regular r:id="rId23"/>
     </p:embeddedFont>
   </p:embeddedFontLst>
   <p:defaultTextStyle>
@@ -3528,7 +3531,7 @@
         </p:nvSpPr>
         <p:spPr>
           <a:xfrm rot="0">
-            <a:off x="5042471" y="971550"/>
+            <a:off x="5042471" y="542336"/>
             <a:ext cx="8203057" cy="1743049"/>
           </a:xfrm>
           <a:prstGeom prst="rect">
@@ -3556,90 +3559,14 @@
                 <a:cs typeface="Stinger Wide Bold"/>
                 <a:sym typeface="Stinger Wide Bold"/>
               </a:rPr>
-              <a:t>Future developments</a:t>
+              <a:t>Results and evaluation</a:t>
             </a:r>
           </a:p>
         </p:txBody>
       </p:sp>
       <p:sp>
         <p:nvSpPr>
-          <p:cNvPr name="TextBox 3" id="3"/>
-          <p:cNvSpPr txBox="true"/>
-          <p:nvPr/>
-        </p:nvSpPr>
-        <p:spPr>
-          <a:xfrm rot="0">
-            <a:off x="3654871" y="3456469"/>
-            <a:ext cx="11067004" cy="2428403"/>
-          </a:xfrm>
-          <a:prstGeom prst="rect">
-            <a:avLst/>
-          </a:prstGeom>
-        </p:spPr>
-        <p:txBody>
-          <a:bodyPr anchor="t" rtlCol="false" tIns="0" lIns="0" bIns="0" rIns="0">
-            <a:spAutoFit/>
-          </a:bodyPr>
-          <a:lstStyle/>
-          <a:p>
-            <a:pPr algn="l" marL="489791" indent="-244895" lvl="1">
-              <a:lnSpc>
-                <a:spcPts val="3176"/>
-              </a:lnSpc>
-              <a:buFont typeface="Arial"/>
-              <a:buChar char="•"/>
-            </a:pPr>
-            <a:r>
-              <a:rPr lang="en-US" sz="2268" spc="24">
-                <a:solidFill>
-                  <a:srgbClr val="000000"/>
-                </a:solidFill>
-                <a:latin typeface="Codec Pro"/>
-                <a:ea typeface="Codec Pro"/>
-                <a:cs typeface="Codec Pro"/>
-                <a:sym typeface="Codec Pro"/>
-              </a:rPr>
-              <a:t>Physical Prototyping: T</a:t>
-            </a:r>
-            <a:r>
-              <a:rPr lang="en-US" sz="2268" spc="24">
-                <a:solidFill>
-                  <a:srgbClr val="000000"/>
-                </a:solidFill>
-                <a:latin typeface="Codec Pro"/>
-                <a:ea typeface="Codec Pro"/>
-                <a:cs typeface="Codec Pro"/>
-                <a:sym typeface="Codec Pro"/>
-              </a:rPr>
-              <a:t>ransition from simulation to physical manufacturing using 3D printed molds to cast silicone, allowing for a direct comparison between the FEM simulation and real-world kinematic behavior.</a:t>
-            </a:r>
-          </a:p>
-          <a:p>
-            <a:pPr algn="l" marL="489791" indent="-244895" lvl="1">
-              <a:lnSpc>
-                <a:spcPts val="3176"/>
-              </a:lnSpc>
-              <a:buFont typeface="Arial"/>
-              <a:buChar char="•"/>
-            </a:pPr>
-            <a:r>
-              <a:rPr lang="en-US" sz="2268" spc="24">
-                <a:solidFill>
-                  <a:srgbClr val="000000"/>
-                </a:solidFill>
-                <a:latin typeface="Codec Pro"/>
-                <a:ea typeface="Codec Pro"/>
-                <a:cs typeface="Codec Pro"/>
-                <a:sym typeface="Codec Pro"/>
-              </a:rPr>
-              <a:t>Controller Upgrade: Implement a closed-loop control system to replace the current open-loop cosine function, enabling more precise trajectory tracking.</a:t>
-            </a:r>
-          </a:p>
-        </p:txBody>
-      </p:sp>
-      <p:sp>
-        <p:nvSpPr>
-          <p:cNvPr name="Freeform 4" id="4"/>
+          <p:cNvPr name="Freeform 3" id="3"/>
           <p:cNvSpPr/>
           <p:nvPr/>
         </p:nvSpPr>
@@ -3692,7 +3619,7 @@
       </p:sp>
       <p:sp>
         <p:nvSpPr>
-          <p:cNvPr name="Freeform 5" id="5"/>
+          <p:cNvPr name="Freeform 4" id="4"/>
           <p:cNvSpPr/>
           <p:nvPr/>
         </p:nvSpPr>
@@ -3738,7 +3665,7 @@
       </p:sp>
       <p:sp>
         <p:nvSpPr>
-          <p:cNvPr name="Freeform 6" id="6"/>
+          <p:cNvPr name="Freeform 5" id="5"/>
           <p:cNvSpPr/>
           <p:nvPr/>
         </p:nvSpPr>
@@ -3784,7 +3711,7 @@
       </p:sp>
       <p:sp>
         <p:nvSpPr>
-          <p:cNvPr name="Freeform 7" id="7"/>
+          <p:cNvPr name="Freeform 6" id="6"/>
           <p:cNvSpPr/>
           <p:nvPr/>
         </p:nvSpPr>
@@ -3836,7 +3763,7 @@
       </p:sp>
       <p:sp>
         <p:nvSpPr>
-          <p:cNvPr name="Freeform 8" id="8"/>
+          <p:cNvPr name="Freeform 7" id="7"/>
           <p:cNvSpPr/>
           <p:nvPr/>
         </p:nvSpPr>
@@ -3888,7 +3815,7 @@
       </p:sp>
       <p:sp>
         <p:nvSpPr>
-          <p:cNvPr name="Freeform 9" id="9"/>
+          <p:cNvPr name="Freeform 8" id="8"/>
           <p:cNvSpPr/>
           <p:nvPr/>
         </p:nvSpPr>
@@ -3941,7 +3868,7 @@
       </p:sp>
       <p:sp>
         <p:nvSpPr>
-          <p:cNvPr name="Freeform 10" id="10"/>
+          <p:cNvPr name="Freeform 9" id="9"/>
           <p:cNvSpPr/>
           <p:nvPr/>
         </p:nvSpPr>
@@ -3994,7 +3921,7 @@
       </p:sp>
       <p:sp>
         <p:nvSpPr>
-          <p:cNvPr name="Freeform 11" id="11"/>
+          <p:cNvPr name="Freeform 10" id="10"/>
           <p:cNvSpPr/>
           <p:nvPr/>
         </p:nvSpPr>
@@ -4045,6 +3972,1210 @@
           </a:blipFill>
         </p:spPr>
       </p:sp>
+      <p:pic>
+        <p:nvPicPr>
+          <p:cNvPr name="Picture 11" id="11">
+            <a:hlinkClick action="ppaction://media"/>
+          </p:cNvPr>
+          <p:cNvPicPr>
+            <a:picLocks noChangeAspect="true"/>
+          </p:cNvPicPr>
+          <p:nvPr>
+            <a:videoFile r:link="rId13"/>
+            <p:extLst>
+              <p:ext uri="{DAA4B4D4-6D71-4841-9C94-3DE7FCFB9230}">
+                <p14:media xmlns:p14="http://schemas.microsoft.com/office/powerpoint/2010/main" r:embed="rId14"/>
+              </p:ext>
+            </p:extLst>
+          </p:nvPr>
+        </p:nvPicPr>
+        <p:blipFill>
+          <a:blip r:embed="rId12"/>
+          <a:srcRect l="521" t="0" r="521" b="0"/>
+          <a:stretch>
+            <a:fillRect/>
+          </a:stretch>
+        </p:blipFill>
+        <p:spPr>
+          <a:xfrm flipH="false" flipV="false" rot="0">
+            <a:off x="4069569" y="3062983"/>
+            <a:ext cx="10148861" cy="4161033"/>
+          </a:xfrm>
+          <a:prstGeom prst="rect">
+            <a:avLst/>
+          </a:prstGeom>
+        </p:spPr>
+      </p:pic>
+    </p:spTree>
+  </p:cSld>
+  <p:clrMapOvr>
+    <a:masterClrMapping/>
+  </p:clrMapOvr>
+  <p:timing>
+    <p:tnLst>
+      <p:par>
+        <p:cTn dur="indefinite" restart="never" nodeType="tmRoot">
+          <p:childTnLst>
+            <p:video>
+              <p:cMediaNode vol="100000">
+                <p:cTn fill="hold" display="false">
+                  <p:stCondLst>
+                    <p:cond delay="indefinite"/>
+                  </p:stCondLst>
+                </p:cTn>
+                <p:tgtEl>
+                  <p:spTgt spid="11"/>
+                </p:tgtEl>
+              </p:cMediaNode>
+            </p:video>
+          </p:childTnLst>
+        </p:cTn>
+      </p:par>
+    </p:tnLst>
+  </p:timing>
+</p:sld>
+</file>
+
+<file path=ppt/slides/slide11.xml><?xml version="1.0" encoding="utf-8"?>
+<p:sld xmlns:p="http://schemas.openxmlformats.org/presentationml/2006/main" xmlns:a="http://schemas.openxmlformats.org/drawingml/2006/main" xmlns:r="http://schemas.openxmlformats.org/officeDocument/2006/relationships">
+  <p:cSld>
+    <p:bg>
+      <p:bgPr>
+        <a:solidFill>
+          <a:srgbClr val="FEF6F3"/>
+        </a:solidFill>
+      </p:bgPr>
+    </p:bg>
+    <p:spTree>
+      <p:nvGrpSpPr>
+        <p:cNvPr id="1" name=""/>
+        <p:cNvGrpSpPr/>
+        <p:nvPr/>
+      </p:nvGrpSpPr>
+      <p:grpSpPr>
+        <a:xfrm>
+          <a:off x="0" y="0"/>
+          <a:ext cx="0" cy="0"/>
+          <a:chOff x="0" y="0"/>
+          <a:chExt cx="0" cy="0"/>
+        </a:xfrm>
+      </p:grpSpPr>
+      <p:sp>
+        <p:nvSpPr>
+          <p:cNvPr name="TextBox 2" id="2"/>
+          <p:cNvSpPr txBox="true"/>
+          <p:nvPr/>
+        </p:nvSpPr>
+        <p:spPr>
+          <a:xfrm rot="0">
+            <a:off x="5042471" y="542336"/>
+            <a:ext cx="8203057" cy="1743049"/>
+          </a:xfrm>
+          <a:prstGeom prst="rect">
+            <a:avLst/>
+          </a:prstGeom>
+        </p:spPr>
+        <p:txBody>
+          <a:bodyPr anchor="t" rtlCol="false" tIns="0" lIns="0" bIns="0" rIns="0">
+            <a:spAutoFit/>
+          </a:bodyPr>
+          <a:lstStyle/>
+          <a:p>
+            <a:pPr algn="ctr">
+              <a:lnSpc>
+                <a:spcPts val="6641"/>
+              </a:lnSpc>
+            </a:pPr>
+            <a:r>
+              <a:rPr lang="en-US" sz="6846" b="true">
+                <a:solidFill>
+                  <a:srgbClr val="214184"/>
+                </a:solidFill>
+                <a:latin typeface="Stinger Wide Bold"/>
+                <a:ea typeface="Stinger Wide Bold"/>
+                <a:cs typeface="Stinger Wide Bold"/>
+                <a:sym typeface="Stinger Wide Bold"/>
+              </a:rPr>
+              <a:t>Results and evaluation</a:t>
+            </a:r>
+          </a:p>
+        </p:txBody>
+      </p:sp>
+      <p:sp>
+        <p:nvSpPr>
+          <p:cNvPr name="Freeform 3" id="3"/>
+          <p:cNvSpPr/>
+          <p:nvPr/>
+        </p:nvSpPr>
+        <p:spPr>
+          <a:xfrm flipH="false" flipV="false" rot="2571653">
+            <a:off x="16043607" y="1949665"/>
+            <a:ext cx="4488785" cy="5378719"/>
+          </a:xfrm>
+          <a:custGeom>
+            <a:avLst/>
+            <a:gdLst/>
+            <a:ahLst/>
+            <a:cxnLst/>
+            <a:rect r="r" b="b" t="t" l="l"/>
+            <a:pathLst>
+              <a:path h="5378719" w="4488785">
+                <a:moveTo>
+                  <a:pt x="0" y="0"/>
+                </a:moveTo>
+                <a:lnTo>
+                  <a:pt x="4488786" y="0"/>
+                </a:lnTo>
+                <a:lnTo>
+                  <a:pt x="4488786" y="5378719"/>
+                </a:lnTo>
+                <a:lnTo>
+                  <a:pt x="0" y="5378719"/>
+                </a:lnTo>
+                <a:lnTo>
+                  <a:pt x="0" y="0"/>
+                </a:lnTo>
+                <a:close/>
+              </a:path>
+            </a:pathLst>
+          </a:custGeom>
+          <a:blipFill>
+            <a:blip r:embed="rId2">
+              <a:alphaModFix amt="21999"/>
+              <a:extLst>
+                <a:ext uri="{96DAC541-7B7A-43D3-8B79-37D633B846F1}">
+                  <asvg:svgBlip xmlns:asvg="http://schemas.microsoft.com/office/drawing/2016/SVG/main" r:embed="rId3"/>
+                </a:ext>
+              </a:extLst>
+            </a:blip>
+            <a:stretch>
+              <a:fillRect l="0" t="0" r="0" b="0"/>
+            </a:stretch>
+          </a:blipFill>
+        </p:spPr>
+      </p:sp>
+      <p:sp>
+        <p:nvSpPr>
+          <p:cNvPr name="Freeform 4" id="4"/>
+          <p:cNvSpPr/>
+          <p:nvPr/>
+        </p:nvSpPr>
+        <p:spPr>
+          <a:xfrm flipH="false" flipV="false" rot="0">
+            <a:off x="14721875" y="6598087"/>
+            <a:ext cx="3969133" cy="4512515"/>
+          </a:xfrm>
+          <a:custGeom>
+            <a:avLst/>
+            <a:gdLst/>
+            <a:ahLst/>
+            <a:cxnLst/>
+            <a:rect r="r" b="b" t="t" l="l"/>
+            <a:pathLst>
+              <a:path h="4512515" w="3969133">
+                <a:moveTo>
+                  <a:pt x="0" y="0"/>
+                </a:moveTo>
+                <a:lnTo>
+                  <a:pt x="3969132" y="0"/>
+                </a:lnTo>
+                <a:lnTo>
+                  <a:pt x="3969132" y="4512515"/>
+                </a:lnTo>
+                <a:lnTo>
+                  <a:pt x="0" y="4512515"/>
+                </a:lnTo>
+                <a:lnTo>
+                  <a:pt x="0" y="0"/>
+                </a:lnTo>
+                <a:close/>
+              </a:path>
+            </a:pathLst>
+          </a:custGeom>
+          <a:blipFill>
+            <a:blip r:embed="rId4"/>
+            <a:stretch>
+              <a:fillRect l="0" t="0" r="0" b="0"/>
+            </a:stretch>
+          </a:blipFill>
+        </p:spPr>
+      </p:sp>
+      <p:sp>
+        <p:nvSpPr>
+          <p:cNvPr name="Freeform 5" id="5"/>
+          <p:cNvSpPr/>
+          <p:nvPr/>
+        </p:nvSpPr>
+        <p:spPr>
+          <a:xfrm flipH="false" flipV="false" rot="0">
+            <a:off x="-611425" y="6598087"/>
+            <a:ext cx="3280251" cy="4108874"/>
+          </a:xfrm>
+          <a:custGeom>
+            <a:avLst/>
+            <a:gdLst/>
+            <a:ahLst/>
+            <a:cxnLst/>
+            <a:rect r="r" b="b" t="t" l="l"/>
+            <a:pathLst>
+              <a:path h="4108874" w="3280251">
+                <a:moveTo>
+                  <a:pt x="0" y="0"/>
+                </a:moveTo>
+                <a:lnTo>
+                  <a:pt x="3280250" y="0"/>
+                </a:lnTo>
+                <a:lnTo>
+                  <a:pt x="3280250" y="4108874"/>
+                </a:lnTo>
+                <a:lnTo>
+                  <a:pt x="0" y="4108874"/>
+                </a:lnTo>
+                <a:lnTo>
+                  <a:pt x="0" y="0"/>
+                </a:lnTo>
+                <a:close/>
+              </a:path>
+            </a:pathLst>
+          </a:custGeom>
+          <a:blipFill>
+            <a:blip r:embed="rId5"/>
+            <a:stretch>
+              <a:fillRect l="0" t="0" r="0" b="0"/>
+            </a:stretch>
+          </a:blipFill>
+        </p:spPr>
+      </p:sp>
+      <p:sp>
+        <p:nvSpPr>
+          <p:cNvPr name="Freeform 6" id="6"/>
+          <p:cNvSpPr/>
+          <p:nvPr/>
+        </p:nvSpPr>
+        <p:spPr>
+          <a:xfrm flipH="false" flipV="false" rot="3921125">
+            <a:off x="12766498" y="-1741514"/>
+            <a:ext cx="5550511" cy="5550511"/>
+          </a:xfrm>
+          <a:custGeom>
+            <a:avLst/>
+            <a:gdLst/>
+            <a:ahLst/>
+            <a:cxnLst/>
+            <a:rect r="r" b="b" t="t" l="l"/>
+            <a:pathLst>
+              <a:path h="5550511" w="5550511">
+                <a:moveTo>
+                  <a:pt x="0" y="0"/>
+                </a:moveTo>
+                <a:lnTo>
+                  <a:pt x="5550511" y="0"/>
+                </a:lnTo>
+                <a:lnTo>
+                  <a:pt x="5550511" y="5550511"/>
+                </a:lnTo>
+                <a:lnTo>
+                  <a:pt x="0" y="5550511"/>
+                </a:lnTo>
+                <a:lnTo>
+                  <a:pt x="0" y="0"/>
+                </a:lnTo>
+                <a:close/>
+              </a:path>
+            </a:pathLst>
+          </a:custGeom>
+          <a:blipFill>
+            <a:blip r:embed="rId6">
+              <a:extLst>
+                <a:ext uri="{96DAC541-7B7A-43D3-8B79-37D633B846F1}">
+                  <asvg:svgBlip xmlns:asvg="http://schemas.microsoft.com/office/drawing/2016/SVG/main" r:embed="rId7"/>
+                </a:ext>
+              </a:extLst>
+            </a:blip>
+            <a:stretch>
+              <a:fillRect l="0" t="0" r="0" b="0"/>
+            </a:stretch>
+          </a:blipFill>
+        </p:spPr>
+      </p:sp>
+      <p:sp>
+        <p:nvSpPr>
+          <p:cNvPr name="Freeform 7" id="7"/>
+          <p:cNvSpPr/>
+          <p:nvPr/>
+        </p:nvSpPr>
+        <p:spPr>
+          <a:xfrm flipH="false" flipV="false" rot="0">
+            <a:off x="0" y="-710214"/>
+            <a:ext cx="4581255" cy="4114800"/>
+          </a:xfrm>
+          <a:custGeom>
+            <a:avLst/>
+            <a:gdLst/>
+            <a:ahLst/>
+            <a:cxnLst/>
+            <a:rect r="r" b="b" t="t" l="l"/>
+            <a:pathLst>
+              <a:path h="4114800" w="4581255">
+                <a:moveTo>
+                  <a:pt x="0" y="0"/>
+                </a:moveTo>
+                <a:lnTo>
+                  <a:pt x="4581255" y="0"/>
+                </a:lnTo>
+                <a:lnTo>
+                  <a:pt x="4581255" y="4114800"/>
+                </a:lnTo>
+                <a:lnTo>
+                  <a:pt x="0" y="4114800"/>
+                </a:lnTo>
+                <a:lnTo>
+                  <a:pt x="0" y="0"/>
+                </a:lnTo>
+                <a:close/>
+              </a:path>
+            </a:pathLst>
+          </a:custGeom>
+          <a:blipFill>
+            <a:blip r:embed="rId8">
+              <a:extLst>
+                <a:ext uri="{96DAC541-7B7A-43D3-8B79-37D633B846F1}">
+                  <asvg:svgBlip xmlns:asvg="http://schemas.microsoft.com/office/drawing/2016/SVG/main" r:embed="rId9"/>
+                </a:ext>
+              </a:extLst>
+            </a:blip>
+            <a:stretch>
+              <a:fillRect l="0" t="0" r="0" b="0"/>
+            </a:stretch>
+          </a:blipFill>
+        </p:spPr>
+      </p:sp>
+      <p:sp>
+        <p:nvSpPr>
+          <p:cNvPr name="Freeform 8" id="8"/>
+          <p:cNvSpPr/>
+          <p:nvPr/>
+        </p:nvSpPr>
+        <p:spPr>
+          <a:xfrm flipH="false" flipV="false" rot="2571653">
+            <a:off x="-3050082" y="2465162"/>
+            <a:ext cx="4488785" cy="5378719"/>
+          </a:xfrm>
+          <a:custGeom>
+            <a:avLst/>
+            <a:gdLst/>
+            <a:ahLst/>
+            <a:cxnLst/>
+            <a:rect r="r" b="b" t="t" l="l"/>
+            <a:pathLst>
+              <a:path h="5378719" w="4488785">
+                <a:moveTo>
+                  <a:pt x="0" y="0"/>
+                </a:moveTo>
+                <a:lnTo>
+                  <a:pt x="4488786" y="0"/>
+                </a:lnTo>
+                <a:lnTo>
+                  <a:pt x="4488786" y="5378719"/>
+                </a:lnTo>
+                <a:lnTo>
+                  <a:pt x="0" y="5378719"/>
+                </a:lnTo>
+                <a:lnTo>
+                  <a:pt x="0" y="0"/>
+                </a:lnTo>
+                <a:close/>
+              </a:path>
+            </a:pathLst>
+          </a:custGeom>
+          <a:blipFill>
+            <a:blip r:embed="rId2">
+              <a:alphaModFix amt="21999"/>
+              <a:extLst>
+                <a:ext uri="{96DAC541-7B7A-43D3-8B79-37D633B846F1}">
+                  <asvg:svgBlip xmlns:asvg="http://schemas.microsoft.com/office/drawing/2016/SVG/main" r:embed="rId3"/>
+                </a:ext>
+              </a:extLst>
+            </a:blip>
+            <a:stretch>
+              <a:fillRect l="0" t="0" r="0" b="0"/>
+            </a:stretch>
+          </a:blipFill>
+        </p:spPr>
+      </p:sp>
+      <p:sp>
+        <p:nvSpPr>
+          <p:cNvPr name="Freeform 9" id="9"/>
+          <p:cNvSpPr/>
+          <p:nvPr/>
+        </p:nvSpPr>
+        <p:spPr>
+          <a:xfrm flipH="false" flipV="false" rot="0">
+            <a:off x="10166210" y="7892064"/>
+            <a:ext cx="4647276" cy="3099786"/>
+          </a:xfrm>
+          <a:custGeom>
+            <a:avLst/>
+            <a:gdLst/>
+            <a:ahLst/>
+            <a:cxnLst/>
+            <a:rect r="r" b="b" t="t" l="l"/>
+            <a:pathLst>
+              <a:path h="3099786" w="4647276">
+                <a:moveTo>
+                  <a:pt x="0" y="0"/>
+                </a:moveTo>
+                <a:lnTo>
+                  <a:pt x="4647276" y="0"/>
+                </a:lnTo>
+                <a:lnTo>
+                  <a:pt x="4647276" y="3099786"/>
+                </a:lnTo>
+                <a:lnTo>
+                  <a:pt x="0" y="3099786"/>
+                </a:lnTo>
+                <a:lnTo>
+                  <a:pt x="0" y="0"/>
+                </a:lnTo>
+                <a:close/>
+              </a:path>
+            </a:pathLst>
+          </a:custGeom>
+          <a:blipFill>
+            <a:blip r:embed="rId10">
+              <a:alphaModFix amt="43000"/>
+              <a:extLst>
+                <a:ext uri="{96DAC541-7B7A-43D3-8B79-37D633B846F1}">
+                  <asvg:svgBlip xmlns:asvg="http://schemas.microsoft.com/office/drawing/2016/SVG/main" r:embed="rId11"/>
+                </a:ext>
+              </a:extLst>
+            </a:blip>
+            <a:stretch>
+              <a:fillRect l="0" t="0" r="0" b="0"/>
+            </a:stretch>
+          </a:blipFill>
+        </p:spPr>
+      </p:sp>
+      <p:sp>
+        <p:nvSpPr>
+          <p:cNvPr name="Freeform 10" id="10"/>
+          <p:cNvSpPr/>
+          <p:nvPr/>
+        </p:nvSpPr>
+        <p:spPr>
+          <a:xfrm flipH="true" flipV="false" rot="0">
+            <a:off x="3281798" y="7892064"/>
+            <a:ext cx="4647276" cy="3099786"/>
+          </a:xfrm>
+          <a:custGeom>
+            <a:avLst/>
+            <a:gdLst/>
+            <a:ahLst/>
+            <a:cxnLst/>
+            <a:rect r="r" b="b" t="t" l="l"/>
+            <a:pathLst>
+              <a:path h="3099786" w="4647276">
+                <a:moveTo>
+                  <a:pt x="4647276" y="0"/>
+                </a:moveTo>
+                <a:lnTo>
+                  <a:pt x="0" y="0"/>
+                </a:lnTo>
+                <a:lnTo>
+                  <a:pt x="0" y="3099786"/>
+                </a:lnTo>
+                <a:lnTo>
+                  <a:pt x="4647276" y="3099786"/>
+                </a:lnTo>
+                <a:lnTo>
+                  <a:pt x="4647276" y="0"/>
+                </a:lnTo>
+                <a:close/>
+              </a:path>
+            </a:pathLst>
+          </a:custGeom>
+          <a:blipFill>
+            <a:blip r:embed="rId10">
+              <a:alphaModFix amt="43000"/>
+              <a:extLst>
+                <a:ext uri="{96DAC541-7B7A-43D3-8B79-37D633B846F1}">
+                  <asvg:svgBlip xmlns:asvg="http://schemas.microsoft.com/office/drawing/2016/SVG/main" r:embed="rId11"/>
+                </a:ext>
+              </a:extLst>
+            </a:blip>
+            <a:stretch>
+              <a:fillRect l="0" t="0" r="0" b="0"/>
+            </a:stretch>
+          </a:blipFill>
+        </p:spPr>
+      </p:sp>
+      <p:pic>
+        <p:nvPicPr>
+          <p:cNvPr name="Picture 11" id="11">
+            <a:hlinkClick action="ppaction://media"/>
+          </p:cNvPr>
+          <p:cNvPicPr>
+            <a:picLocks noChangeAspect="true"/>
+          </p:cNvPicPr>
+          <p:nvPr>
+            <a:videoFile r:link="rId13"/>
+            <p:extLst>
+              <p:ext uri="{DAA4B4D4-6D71-4841-9C94-3DE7FCFB9230}">
+                <p14:media xmlns:p14="http://schemas.microsoft.com/office/powerpoint/2010/main" r:embed="rId14"/>
+              </p:ext>
+            </p:extLst>
+          </p:nvPr>
+        </p:nvPicPr>
+        <p:blipFill>
+          <a:blip r:embed="rId12"/>
+          <a:srcRect l="0" t="197" r="0" b="197"/>
+          <a:stretch>
+            <a:fillRect/>
+          </a:stretch>
+        </p:blipFill>
+        <p:spPr>
+          <a:xfrm flipH="false" flipV="false" rot="0">
+            <a:off x="3781621" y="2848699"/>
+            <a:ext cx="10724757" cy="4611646"/>
+          </a:xfrm>
+          <a:prstGeom prst="rect">
+            <a:avLst/>
+          </a:prstGeom>
+        </p:spPr>
+      </p:pic>
+    </p:spTree>
+  </p:cSld>
+  <p:clrMapOvr>
+    <a:masterClrMapping/>
+  </p:clrMapOvr>
+  <p:timing>
+    <p:tnLst>
+      <p:par>
+        <p:cTn dur="indefinite" restart="never" nodeType="tmRoot">
+          <p:childTnLst>
+            <p:video>
+              <p:cMediaNode vol="100000">
+                <p:cTn fill="hold" display="false">
+                  <p:stCondLst>
+                    <p:cond delay="indefinite"/>
+                  </p:stCondLst>
+                </p:cTn>
+                <p:tgtEl>
+                  <p:spTgt spid="11"/>
+                </p:tgtEl>
+              </p:cMediaNode>
+            </p:video>
+          </p:childTnLst>
+        </p:cTn>
+      </p:par>
+    </p:tnLst>
+  </p:timing>
+</p:sld>
+</file>
+
+<file path=ppt/slides/slide12.xml><?xml version="1.0" encoding="utf-8"?>
+<p:sld xmlns:p="http://schemas.openxmlformats.org/presentationml/2006/main" xmlns:a="http://schemas.openxmlformats.org/drawingml/2006/main" xmlns:r="http://schemas.openxmlformats.org/officeDocument/2006/relationships">
+  <p:cSld>
+    <p:bg>
+      <p:bgPr>
+        <a:solidFill>
+          <a:srgbClr val="FEF6F3"/>
+        </a:solidFill>
+      </p:bgPr>
+    </p:bg>
+    <p:spTree>
+      <p:nvGrpSpPr>
+        <p:cNvPr id="1" name=""/>
+        <p:cNvGrpSpPr/>
+        <p:nvPr/>
+      </p:nvGrpSpPr>
+      <p:grpSpPr>
+        <a:xfrm>
+          <a:off x="0" y="0"/>
+          <a:ext cx="0" cy="0"/>
+          <a:chOff x="0" y="0"/>
+          <a:chExt cx="0" cy="0"/>
+        </a:xfrm>
+      </p:grpSpPr>
+      <p:sp>
+        <p:nvSpPr>
+          <p:cNvPr name="TextBox 2" id="2"/>
+          <p:cNvSpPr txBox="true"/>
+          <p:nvPr/>
+        </p:nvSpPr>
+        <p:spPr>
+          <a:xfrm rot="0">
+            <a:off x="5042471" y="971550"/>
+            <a:ext cx="8203057" cy="1743049"/>
+          </a:xfrm>
+          <a:prstGeom prst="rect">
+            <a:avLst/>
+          </a:prstGeom>
+        </p:spPr>
+        <p:txBody>
+          <a:bodyPr anchor="t" rtlCol="false" tIns="0" lIns="0" bIns="0" rIns="0">
+            <a:spAutoFit/>
+          </a:bodyPr>
+          <a:lstStyle/>
+          <a:p>
+            <a:pPr algn="ctr">
+              <a:lnSpc>
+                <a:spcPts val="6641"/>
+              </a:lnSpc>
+            </a:pPr>
+            <a:r>
+              <a:rPr lang="en-US" sz="6846" b="true">
+                <a:solidFill>
+                  <a:srgbClr val="214184"/>
+                </a:solidFill>
+                <a:latin typeface="Stinger Wide Bold"/>
+                <a:ea typeface="Stinger Wide Bold"/>
+                <a:cs typeface="Stinger Wide Bold"/>
+                <a:sym typeface="Stinger Wide Bold"/>
+              </a:rPr>
+              <a:t>Conclusions and limitations</a:t>
+            </a:r>
+          </a:p>
+        </p:txBody>
+      </p:sp>
+      <p:sp>
+        <p:nvSpPr>
+          <p:cNvPr name="TextBox 3" id="3"/>
+          <p:cNvSpPr txBox="true"/>
+          <p:nvPr/>
+        </p:nvSpPr>
+        <p:spPr>
+          <a:xfrm rot="0">
+            <a:off x="3610498" y="2897333"/>
+            <a:ext cx="11067004" cy="4428653"/>
+          </a:xfrm>
+          <a:prstGeom prst="rect">
+            <a:avLst/>
+          </a:prstGeom>
+        </p:spPr>
+        <p:txBody>
+          <a:bodyPr anchor="t" rtlCol="false" tIns="0" lIns="0" bIns="0" rIns="0">
+            <a:spAutoFit/>
+          </a:bodyPr>
+          <a:lstStyle/>
+          <a:p>
+            <a:pPr algn="l" marL="489791" indent="-244895" lvl="1">
+              <a:lnSpc>
+                <a:spcPts val="3176"/>
+              </a:lnSpc>
+              <a:buFont typeface="Arial"/>
+              <a:buChar char="•"/>
+            </a:pPr>
+            <a:r>
+              <a:rPr lang="en-US" sz="2268" spc="24">
+                <a:solidFill>
+                  <a:srgbClr val="000000"/>
+                </a:solidFill>
+                <a:latin typeface="Codec Pro"/>
+                <a:ea typeface="Codec Pro"/>
+                <a:cs typeface="Codec Pro"/>
+                <a:sym typeface="Codec Pro"/>
+              </a:rPr>
+              <a:t>No Physic</a:t>
+            </a:r>
+            <a:r>
+              <a:rPr lang="en-US" sz="2268" spc="24">
+                <a:solidFill>
+                  <a:srgbClr val="000000"/>
+                </a:solidFill>
+                <a:latin typeface="Codec Pro"/>
+                <a:ea typeface="Codec Pro"/>
+                <a:cs typeface="Codec Pro"/>
+                <a:sym typeface="Codec Pro"/>
+              </a:rPr>
+              <a:t>al In</a:t>
+            </a:r>
+            <a:r>
+              <a:rPr lang="en-US" sz="2268" spc="24">
+                <a:solidFill>
+                  <a:srgbClr val="000000"/>
+                </a:solidFill>
+                <a:latin typeface="Codec Pro"/>
+                <a:ea typeface="Codec Pro"/>
+                <a:cs typeface="Codec Pro"/>
+                <a:sym typeface="Codec Pro"/>
+              </a:rPr>
+              <a:t>teraction (Collision): The current model does not prevent self-collision if the finger is bent excessively.</a:t>
+            </a:r>
+          </a:p>
+          <a:p>
+            <a:pPr algn="l" marL="489791" indent="-244895" lvl="1">
+              <a:lnSpc>
+                <a:spcPts val="3176"/>
+              </a:lnSpc>
+              <a:buFont typeface="Arial"/>
+              <a:buChar char="•"/>
+            </a:pPr>
+            <a:r>
+              <a:rPr lang="en-US" sz="2268" spc="24">
+                <a:solidFill>
+                  <a:srgbClr val="000000"/>
+                </a:solidFill>
+                <a:latin typeface="Codec Pro"/>
+                <a:ea typeface="Codec Pro"/>
+                <a:cs typeface="Codec Pro"/>
+                <a:sym typeface="Codec Pro"/>
+              </a:rPr>
+              <a:t>Cable Simplification: The cable is simulated ideally, ignoring friction between the cable and the internal cavities of the finger wall.</a:t>
+            </a:r>
+          </a:p>
+          <a:p>
+            <a:pPr algn="l" marL="489791" indent="-244895" lvl="1">
+              <a:lnSpc>
+                <a:spcPts val="3176"/>
+              </a:lnSpc>
+              <a:buFont typeface="Arial"/>
+              <a:buChar char="•"/>
+            </a:pPr>
+            <a:r>
+              <a:rPr lang="en-US" sz="2268" spc="24">
+                <a:solidFill>
+                  <a:srgbClr val="000000"/>
+                </a:solidFill>
+                <a:latin typeface="Codec Pro"/>
+                <a:ea typeface="Codec Pro"/>
+                <a:cs typeface="Codec Pro"/>
+                <a:sym typeface="Codec Pro"/>
+              </a:rPr>
+              <a:t>Design Constraints: The finger is a solid block, lacking the bellows structure commonly seen in reality to optimize the bending angle.</a:t>
+            </a:r>
+          </a:p>
+          <a:p>
+            <a:pPr algn="l" marL="489791" indent="-244895" lvl="1">
+              <a:lnSpc>
+                <a:spcPts val="3176"/>
+              </a:lnSpc>
+              <a:buFont typeface="Arial"/>
+              <a:buChar char="•"/>
+            </a:pPr>
+            <a:r>
+              <a:rPr lang="en-US" sz="2268" spc="24">
+                <a:solidFill>
+                  <a:srgbClr val="000000"/>
+                </a:solidFill>
+                <a:latin typeface="Codec Pro"/>
+                <a:ea typeface="Codec Pro"/>
+                <a:cs typeface="Codec Pro"/>
+                <a:sym typeface="Codec Pro"/>
+              </a:rPr>
+              <a:t>Ideal Actuation Assumptions: The simulation assumes an idealized cable pull with instantaneous response and infinite force. It does not account for the electromechanical constraints of a real actuator system, such as motor torque limits, inertia, or signal delays within the physical control loop.</a:t>
+            </a:r>
+          </a:p>
+        </p:txBody>
+      </p:sp>
+      <p:sp>
+        <p:nvSpPr>
+          <p:cNvPr name="Freeform 4" id="4"/>
+          <p:cNvSpPr/>
+          <p:nvPr/>
+        </p:nvSpPr>
+        <p:spPr>
+          <a:xfrm flipH="false" flipV="false" rot="2571653">
+            <a:off x="16043607" y="1949665"/>
+            <a:ext cx="4488785" cy="5378719"/>
+          </a:xfrm>
+          <a:custGeom>
+            <a:avLst/>
+            <a:gdLst/>
+            <a:ahLst/>
+            <a:cxnLst/>
+            <a:rect r="r" b="b" t="t" l="l"/>
+            <a:pathLst>
+              <a:path h="5378719" w="4488785">
+                <a:moveTo>
+                  <a:pt x="0" y="0"/>
+                </a:moveTo>
+                <a:lnTo>
+                  <a:pt x="4488786" y="0"/>
+                </a:lnTo>
+                <a:lnTo>
+                  <a:pt x="4488786" y="5378719"/>
+                </a:lnTo>
+                <a:lnTo>
+                  <a:pt x="0" y="5378719"/>
+                </a:lnTo>
+                <a:lnTo>
+                  <a:pt x="0" y="0"/>
+                </a:lnTo>
+                <a:close/>
+              </a:path>
+            </a:pathLst>
+          </a:custGeom>
+          <a:blipFill>
+            <a:blip r:embed="rId2">
+              <a:alphaModFix amt="21999"/>
+              <a:extLst>
+                <a:ext uri="{96DAC541-7B7A-43D3-8B79-37D633B846F1}">
+                  <asvg:svgBlip xmlns:asvg="http://schemas.microsoft.com/office/drawing/2016/SVG/main" r:embed="rId3"/>
+                </a:ext>
+              </a:extLst>
+            </a:blip>
+            <a:stretch>
+              <a:fillRect l="0" t="0" r="0" b="0"/>
+            </a:stretch>
+          </a:blipFill>
+        </p:spPr>
+      </p:sp>
+      <p:sp>
+        <p:nvSpPr>
+          <p:cNvPr name="Freeform 5" id="5"/>
+          <p:cNvSpPr/>
+          <p:nvPr/>
+        </p:nvSpPr>
+        <p:spPr>
+          <a:xfrm flipH="false" flipV="false" rot="0">
+            <a:off x="14721875" y="6598087"/>
+            <a:ext cx="3969133" cy="4512515"/>
+          </a:xfrm>
+          <a:custGeom>
+            <a:avLst/>
+            <a:gdLst/>
+            <a:ahLst/>
+            <a:cxnLst/>
+            <a:rect r="r" b="b" t="t" l="l"/>
+            <a:pathLst>
+              <a:path h="4512515" w="3969133">
+                <a:moveTo>
+                  <a:pt x="0" y="0"/>
+                </a:moveTo>
+                <a:lnTo>
+                  <a:pt x="3969132" y="0"/>
+                </a:lnTo>
+                <a:lnTo>
+                  <a:pt x="3969132" y="4512515"/>
+                </a:lnTo>
+                <a:lnTo>
+                  <a:pt x="0" y="4512515"/>
+                </a:lnTo>
+                <a:lnTo>
+                  <a:pt x="0" y="0"/>
+                </a:lnTo>
+                <a:close/>
+              </a:path>
+            </a:pathLst>
+          </a:custGeom>
+          <a:blipFill>
+            <a:blip r:embed="rId4"/>
+            <a:stretch>
+              <a:fillRect l="0" t="0" r="0" b="0"/>
+            </a:stretch>
+          </a:blipFill>
+        </p:spPr>
+      </p:sp>
+      <p:sp>
+        <p:nvSpPr>
+          <p:cNvPr name="Freeform 6" id="6"/>
+          <p:cNvSpPr/>
+          <p:nvPr/>
+        </p:nvSpPr>
+        <p:spPr>
+          <a:xfrm flipH="false" flipV="false" rot="0">
+            <a:off x="-611425" y="6598087"/>
+            <a:ext cx="3280251" cy="4108874"/>
+          </a:xfrm>
+          <a:custGeom>
+            <a:avLst/>
+            <a:gdLst/>
+            <a:ahLst/>
+            <a:cxnLst/>
+            <a:rect r="r" b="b" t="t" l="l"/>
+            <a:pathLst>
+              <a:path h="4108874" w="3280251">
+                <a:moveTo>
+                  <a:pt x="0" y="0"/>
+                </a:moveTo>
+                <a:lnTo>
+                  <a:pt x="3280250" y="0"/>
+                </a:lnTo>
+                <a:lnTo>
+                  <a:pt x="3280250" y="4108874"/>
+                </a:lnTo>
+                <a:lnTo>
+                  <a:pt x="0" y="4108874"/>
+                </a:lnTo>
+                <a:lnTo>
+                  <a:pt x="0" y="0"/>
+                </a:lnTo>
+                <a:close/>
+              </a:path>
+            </a:pathLst>
+          </a:custGeom>
+          <a:blipFill>
+            <a:blip r:embed="rId5"/>
+            <a:stretch>
+              <a:fillRect l="0" t="0" r="0" b="0"/>
+            </a:stretch>
+          </a:blipFill>
+        </p:spPr>
+      </p:sp>
+      <p:sp>
+        <p:nvSpPr>
+          <p:cNvPr name="Freeform 7" id="7"/>
+          <p:cNvSpPr/>
+          <p:nvPr/>
+        </p:nvSpPr>
+        <p:spPr>
+          <a:xfrm flipH="false" flipV="false" rot="3921125">
+            <a:off x="12766498" y="-1741514"/>
+            <a:ext cx="5550511" cy="5550511"/>
+          </a:xfrm>
+          <a:custGeom>
+            <a:avLst/>
+            <a:gdLst/>
+            <a:ahLst/>
+            <a:cxnLst/>
+            <a:rect r="r" b="b" t="t" l="l"/>
+            <a:pathLst>
+              <a:path h="5550511" w="5550511">
+                <a:moveTo>
+                  <a:pt x="0" y="0"/>
+                </a:moveTo>
+                <a:lnTo>
+                  <a:pt x="5550511" y="0"/>
+                </a:lnTo>
+                <a:lnTo>
+                  <a:pt x="5550511" y="5550511"/>
+                </a:lnTo>
+                <a:lnTo>
+                  <a:pt x="0" y="5550511"/>
+                </a:lnTo>
+                <a:lnTo>
+                  <a:pt x="0" y="0"/>
+                </a:lnTo>
+                <a:close/>
+              </a:path>
+            </a:pathLst>
+          </a:custGeom>
+          <a:blipFill>
+            <a:blip r:embed="rId6">
+              <a:extLst>
+                <a:ext uri="{96DAC541-7B7A-43D3-8B79-37D633B846F1}">
+                  <asvg:svgBlip xmlns:asvg="http://schemas.microsoft.com/office/drawing/2016/SVG/main" r:embed="rId7"/>
+                </a:ext>
+              </a:extLst>
+            </a:blip>
+            <a:stretch>
+              <a:fillRect l="0" t="0" r="0" b="0"/>
+            </a:stretch>
+          </a:blipFill>
+        </p:spPr>
+      </p:sp>
+      <p:sp>
+        <p:nvSpPr>
+          <p:cNvPr name="Freeform 8" id="8"/>
+          <p:cNvSpPr/>
+          <p:nvPr/>
+        </p:nvSpPr>
+        <p:spPr>
+          <a:xfrm flipH="false" flipV="false" rot="0">
+            <a:off x="0" y="-710214"/>
+            <a:ext cx="4581255" cy="4114800"/>
+          </a:xfrm>
+          <a:custGeom>
+            <a:avLst/>
+            <a:gdLst/>
+            <a:ahLst/>
+            <a:cxnLst/>
+            <a:rect r="r" b="b" t="t" l="l"/>
+            <a:pathLst>
+              <a:path h="4114800" w="4581255">
+                <a:moveTo>
+                  <a:pt x="0" y="0"/>
+                </a:moveTo>
+                <a:lnTo>
+                  <a:pt x="4581255" y="0"/>
+                </a:lnTo>
+                <a:lnTo>
+                  <a:pt x="4581255" y="4114800"/>
+                </a:lnTo>
+                <a:lnTo>
+                  <a:pt x="0" y="4114800"/>
+                </a:lnTo>
+                <a:lnTo>
+                  <a:pt x="0" y="0"/>
+                </a:lnTo>
+                <a:close/>
+              </a:path>
+            </a:pathLst>
+          </a:custGeom>
+          <a:blipFill>
+            <a:blip r:embed="rId8">
+              <a:extLst>
+                <a:ext uri="{96DAC541-7B7A-43D3-8B79-37D633B846F1}">
+                  <asvg:svgBlip xmlns:asvg="http://schemas.microsoft.com/office/drawing/2016/SVG/main" r:embed="rId9"/>
+                </a:ext>
+              </a:extLst>
+            </a:blip>
+            <a:stretch>
+              <a:fillRect l="0" t="0" r="0" b="0"/>
+            </a:stretch>
+          </a:blipFill>
+        </p:spPr>
+      </p:sp>
+      <p:sp>
+        <p:nvSpPr>
+          <p:cNvPr name="Freeform 9" id="9"/>
+          <p:cNvSpPr/>
+          <p:nvPr/>
+        </p:nvSpPr>
+        <p:spPr>
+          <a:xfrm flipH="false" flipV="false" rot="2571653">
+            <a:off x="-3050082" y="2465162"/>
+            <a:ext cx="4488785" cy="5378719"/>
+          </a:xfrm>
+          <a:custGeom>
+            <a:avLst/>
+            <a:gdLst/>
+            <a:ahLst/>
+            <a:cxnLst/>
+            <a:rect r="r" b="b" t="t" l="l"/>
+            <a:pathLst>
+              <a:path h="5378719" w="4488785">
+                <a:moveTo>
+                  <a:pt x="0" y="0"/>
+                </a:moveTo>
+                <a:lnTo>
+                  <a:pt x="4488786" y="0"/>
+                </a:lnTo>
+                <a:lnTo>
+                  <a:pt x="4488786" y="5378719"/>
+                </a:lnTo>
+                <a:lnTo>
+                  <a:pt x="0" y="5378719"/>
+                </a:lnTo>
+                <a:lnTo>
+                  <a:pt x="0" y="0"/>
+                </a:lnTo>
+                <a:close/>
+              </a:path>
+            </a:pathLst>
+          </a:custGeom>
+          <a:blipFill>
+            <a:blip r:embed="rId2">
+              <a:alphaModFix amt="21999"/>
+              <a:extLst>
+                <a:ext uri="{96DAC541-7B7A-43D3-8B79-37D633B846F1}">
+                  <asvg:svgBlip xmlns:asvg="http://schemas.microsoft.com/office/drawing/2016/SVG/main" r:embed="rId3"/>
+                </a:ext>
+              </a:extLst>
+            </a:blip>
+            <a:stretch>
+              <a:fillRect l="0" t="0" r="0" b="0"/>
+            </a:stretch>
+          </a:blipFill>
+        </p:spPr>
+      </p:sp>
+      <p:sp>
+        <p:nvSpPr>
+          <p:cNvPr name="Freeform 10" id="10"/>
+          <p:cNvSpPr/>
+          <p:nvPr/>
+        </p:nvSpPr>
+        <p:spPr>
+          <a:xfrm flipH="false" flipV="false" rot="0">
+            <a:off x="10166210" y="7892064"/>
+            <a:ext cx="4647276" cy="3099786"/>
+          </a:xfrm>
+          <a:custGeom>
+            <a:avLst/>
+            <a:gdLst/>
+            <a:ahLst/>
+            <a:cxnLst/>
+            <a:rect r="r" b="b" t="t" l="l"/>
+            <a:pathLst>
+              <a:path h="3099786" w="4647276">
+                <a:moveTo>
+                  <a:pt x="0" y="0"/>
+                </a:moveTo>
+                <a:lnTo>
+                  <a:pt x="4647276" y="0"/>
+                </a:lnTo>
+                <a:lnTo>
+                  <a:pt x="4647276" y="3099786"/>
+                </a:lnTo>
+                <a:lnTo>
+                  <a:pt x="0" y="3099786"/>
+                </a:lnTo>
+                <a:lnTo>
+                  <a:pt x="0" y="0"/>
+                </a:lnTo>
+                <a:close/>
+              </a:path>
+            </a:pathLst>
+          </a:custGeom>
+          <a:blipFill>
+            <a:blip r:embed="rId10">
+              <a:alphaModFix amt="43000"/>
+              <a:extLst>
+                <a:ext uri="{96DAC541-7B7A-43D3-8B79-37D633B846F1}">
+                  <asvg:svgBlip xmlns:asvg="http://schemas.microsoft.com/office/drawing/2016/SVG/main" r:embed="rId11"/>
+                </a:ext>
+              </a:extLst>
+            </a:blip>
+            <a:stretch>
+              <a:fillRect l="0" t="0" r="0" b="0"/>
+            </a:stretch>
+          </a:blipFill>
+        </p:spPr>
+      </p:sp>
+      <p:sp>
+        <p:nvSpPr>
+          <p:cNvPr name="Freeform 11" id="11"/>
+          <p:cNvSpPr/>
+          <p:nvPr/>
+        </p:nvSpPr>
+        <p:spPr>
+          <a:xfrm flipH="true" flipV="false" rot="0">
+            <a:off x="3281798" y="7892064"/>
+            <a:ext cx="4647276" cy="3099786"/>
+          </a:xfrm>
+          <a:custGeom>
+            <a:avLst/>
+            <a:gdLst/>
+            <a:ahLst/>
+            <a:cxnLst/>
+            <a:rect r="r" b="b" t="t" l="l"/>
+            <a:pathLst>
+              <a:path h="3099786" w="4647276">
+                <a:moveTo>
+                  <a:pt x="4647276" y="0"/>
+                </a:moveTo>
+                <a:lnTo>
+                  <a:pt x="0" y="0"/>
+                </a:lnTo>
+                <a:lnTo>
+                  <a:pt x="0" y="3099786"/>
+                </a:lnTo>
+                <a:lnTo>
+                  <a:pt x="4647276" y="3099786"/>
+                </a:lnTo>
+                <a:lnTo>
+                  <a:pt x="4647276" y="0"/>
+                </a:lnTo>
+                <a:close/>
+              </a:path>
+            </a:pathLst>
+          </a:custGeom>
+          <a:blipFill>
+            <a:blip r:embed="rId10">
+              <a:alphaModFix amt="43000"/>
+              <a:extLst>
+                <a:ext uri="{96DAC541-7B7A-43D3-8B79-37D633B846F1}">
+                  <asvg:svgBlip xmlns:asvg="http://schemas.microsoft.com/office/drawing/2016/SVG/main" r:embed="rId11"/>
+                </a:ext>
+              </a:extLst>
+            </a:blip>
+            <a:stretch>
+              <a:fillRect l="0" t="0" r="0" b="0"/>
+            </a:stretch>
+          </a:blipFill>
+        </p:spPr>
+      </p:sp>
     </p:spTree>
   </p:cSld>
   <p:clrMapOvr>
@@ -4053,7 +5184,564 @@
 </p:sld>
 </file>
 
-<file path=ppt/slides/slide11.xml><?xml version="1.0" encoding="utf-8"?>
+<file path=ppt/slides/slide13.xml><?xml version="1.0" encoding="utf-8"?>
+<p:sld xmlns:p="http://schemas.openxmlformats.org/presentationml/2006/main" xmlns:a="http://schemas.openxmlformats.org/drawingml/2006/main" xmlns:r="http://schemas.openxmlformats.org/officeDocument/2006/relationships">
+  <p:cSld>
+    <p:bg>
+      <p:bgPr>
+        <a:solidFill>
+          <a:srgbClr val="FEF6F3"/>
+        </a:solidFill>
+      </p:bgPr>
+    </p:bg>
+    <p:spTree>
+      <p:nvGrpSpPr>
+        <p:cNvPr id="1" name=""/>
+        <p:cNvGrpSpPr/>
+        <p:nvPr/>
+      </p:nvGrpSpPr>
+      <p:grpSpPr>
+        <a:xfrm>
+          <a:off x="0" y="0"/>
+          <a:ext cx="0" cy="0"/>
+          <a:chOff x="0" y="0"/>
+          <a:chExt cx="0" cy="0"/>
+        </a:xfrm>
+      </p:grpSpPr>
+      <p:sp>
+        <p:nvSpPr>
+          <p:cNvPr name="TextBox 2" id="2"/>
+          <p:cNvSpPr txBox="true"/>
+          <p:nvPr/>
+        </p:nvSpPr>
+        <p:spPr>
+          <a:xfrm rot="0">
+            <a:off x="5042471" y="971550"/>
+            <a:ext cx="8203057" cy="1743049"/>
+          </a:xfrm>
+          <a:prstGeom prst="rect">
+            <a:avLst/>
+          </a:prstGeom>
+        </p:spPr>
+        <p:txBody>
+          <a:bodyPr anchor="t" rtlCol="false" tIns="0" lIns="0" bIns="0" rIns="0">
+            <a:spAutoFit/>
+          </a:bodyPr>
+          <a:lstStyle/>
+          <a:p>
+            <a:pPr algn="ctr">
+              <a:lnSpc>
+                <a:spcPts val="6641"/>
+              </a:lnSpc>
+            </a:pPr>
+            <a:r>
+              <a:rPr lang="en-US" sz="6846" b="true">
+                <a:solidFill>
+                  <a:srgbClr val="214184"/>
+                </a:solidFill>
+                <a:latin typeface="Stinger Wide Bold"/>
+                <a:ea typeface="Stinger Wide Bold"/>
+                <a:cs typeface="Stinger Wide Bold"/>
+                <a:sym typeface="Stinger Wide Bold"/>
+              </a:rPr>
+              <a:t>Future developments</a:t>
+            </a:r>
+          </a:p>
+        </p:txBody>
+      </p:sp>
+      <p:sp>
+        <p:nvSpPr>
+          <p:cNvPr name="TextBox 3" id="3"/>
+          <p:cNvSpPr txBox="true"/>
+          <p:nvPr/>
+        </p:nvSpPr>
+        <p:spPr>
+          <a:xfrm rot="0">
+            <a:off x="3654871" y="3456469"/>
+            <a:ext cx="11067004" cy="2428403"/>
+          </a:xfrm>
+          <a:prstGeom prst="rect">
+            <a:avLst/>
+          </a:prstGeom>
+        </p:spPr>
+        <p:txBody>
+          <a:bodyPr anchor="t" rtlCol="false" tIns="0" lIns="0" bIns="0" rIns="0">
+            <a:spAutoFit/>
+          </a:bodyPr>
+          <a:lstStyle/>
+          <a:p>
+            <a:pPr algn="l" marL="489791" indent="-244895" lvl="1">
+              <a:lnSpc>
+                <a:spcPts val="3176"/>
+              </a:lnSpc>
+              <a:buFont typeface="Arial"/>
+              <a:buChar char="•"/>
+            </a:pPr>
+            <a:r>
+              <a:rPr lang="en-US" sz="2268" spc="24">
+                <a:solidFill>
+                  <a:srgbClr val="000000"/>
+                </a:solidFill>
+                <a:latin typeface="Codec Pro"/>
+                <a:ea typeface="Codec Pro"/>
+                <a:cs typeface="Codec Pro"/>
+                <a:sym typeface="Codec Pro"/>
+              </a:rPr>
+              <a:t>Physical Prototyping: T</a:t>
+            </a:r>
+            <a:r>
+              <a:rPr lang="en-US" sz="2268" spc="24">
+                <a:solidFill>
+                  <a:srgbClr val="000000"/>
+                </a:solidFill>
+                <a:latin typeface="Codec Pro"/>
+                <a:ea typeface="Codec Pro"/>
+                <a:cs typeface="Codec Pro"/>
+                <a:sym typeface="Codec Pro"/>
+              </a:rPr>
+              <a:t>ransition from simulation to physical manufacturing using 3D printed molds to cast silicone, allowing for a direct comparison between the FEM simulation and real-world kinematic behavior.</a:t>
+            </a:r>
+          </a:p>
+          <a:p>
+            <a:pPr algn="l" marL="489791" indent="-244895" lvl="1">
+              <a:lnSpc>
+                <a:spcPts val="3176"/>
+              </a:lnSpc>
+              <a:buFont typeface="Arial"/>
+              <a:buChar char="•"/>
+            </a:pPr>
+            <a:r>
+              <a:rPr lang="en-US" sz="2268" spc="24">
+                <a:solidFill>
+                  <a:srgbClr val="000000"/>
+                </a:solidFill>
+                <a:latin typeface="Codec Pro"/>
+                <a:ea typeface="Codec Pro"/>
+                <a:cs typeface="Codec Pro"/>
+                <a:sym typeface="Codec Pro"/>
+              </a:rPr>
+              <a:t>Controller Upgrade: Implement a closed-loop control system to replace the current open-loop cosine function, enabling more precise trajectory tracking.</a:t>
+            </a:r>
+          </a:p>
+        </p:txBody>
+      </p:sp>
+      <p:sp>
+        <p:nvSpPr>
+          <p:cNvPr name="Freeform 4" id="4"/>
+          <p:cNvSpPr/>
+          <p:nvPr/>
+        </p:nvSpPr>
+        <p:spPr>
+          <a:xfrm flipH="false" flipV="false" rot="2571653">
+            <a:off x="16043607" y="1949665"/>
+            <a:ext cx="4488785" cy="5378719"/>
+          </a:xfrm>
+          <a:custGeom>
+            <a:avLst/>
+            <a:gdLst/>
+            <a:ahLst/>
+            <a:cxnLst/>
+            <a:rect r="r" b="b" t="t" l="l"/>
+            <a:pathLst>
+              <a:path h="5378719" w="4488785">
+                <a:moveTo>
+                  <a:pt x="0" y="0"/>
+                </a:moveTo>
+                <a:lnTo>
+                  <a:pt x="4488786" y="0"/>
+                </a:lnTo>
+                <a:lnTo>
+                  <a:pt x="4488786" y="5378719"/>
+                </a:lnTo>
+                <a:lnTo>
+                  <a:pt x="0" y="5378719"/>
+                </a:lnTo>
+                <a:lnTo>
+                  <a:pt x="0" y="0"/>
+                </a:lnTo>
+                <a:close/>
+              </a:path>
+            </a:pathLst>
+          </a:custGeom>
+          <a:blipFill>
+            <a:blip r:embed="rId2">
+              <a:alphaModFix amt="21999"/>
+              <a:extLst>
+                <a:ext uri="{96DAC541-7B7A-43D3-8B79-37D633B846F1}">
+                  <asvg:svgBlip xmlns:asvg="http://schemas.microsoft.com/office/drawing/2016/SVG/main" r:embed="rId3"/>
+                </a:ext>
+              </a:extLst>
+            </a:blip>
+            <a:stretch>
+              <a:fillRect l="0" t="0" r="0" b="0"/>
+            </a:stretch>
+          </a:blipFill>
+        </p:spPr>
+      </p:sp>
+      <p:sp>
+        <p:nvSpPr>
+          <p:cNvPr name="Freeform 5" id="5"/>
+          <p:cNvSpPr/>
+          <p:nvPr/>
+        </p:nvSpPr>
+        <p:spPr>
+          <a:xfrm flipH="false" flipV="false" rot="0">
+            <a:off x="14721875" y="6598087"/>
+            <a:ext cx="3969133" cy="4512515"/>
+          </a:xfrm>
+          <a:custGeom>
+            <a:avLst/>
+            <a:gdLst/>
+            <a:ahLst/>
+            <a:cxnLst/>
+            <a:rect r="r" b="b" t="t" l="l"/>
+            <a:pathLst>
+              <a:path h="4512515" w="3969133">
+                <a:moveTo>
+                  <a:pt x="0" y="0"/>
+                </a:moveTo>
+                <a:lnTo>
+                  <a:pt x="3969132" y="0"/>
+                </a:lnTo>
+                <a:lnTo>
+                  <a:pt x="3969132" y="4512515"/>
+                </a:lnTo>
+                <a:lnTo>
+                  <a:pt x="0" y="4512515"/>
+                </a:lnTo>
+                <a:lnTo>
+                  <a:pt x="0" y="0"/>
+                </a:lnTo>
+                <a:close/>
+              </a:path>
+            </a:pathLst>
+          </a:custGeom>
+          <a:blipFill>
+            <a:blip r:embed="rId4"/>
+            <a:stretch>
+              <a:fillRect l="0" t="0" r="0" b="0"/>
+            </a:stretch>
+          </a:blipFill>
+        </p:spPr>
+      </p:sp>
+      <p:sp>
+        <p:nvSpPr>
+          <p:cNvPr name="Freeform 6" id="6"/>
+          <p:cNvSpPr/>
+          <p:nvPr/>
+        </p:nvSpPr>
+        <p:spPr>
+          <a:xfrm flipH="false" flipV="false" rot="0">
+            <a:off x="-611425" y="6598087"/>
+            <a:ext cx="3280251" cy="4108874"/>
+          </a:xfrm>
+          <a:custGeom>
+            <a:avLst/>
+            <a:gdLst/>
+            <a:ahLst/>
+            <a:cxnLst/>
+            <a:rect r="r" b="b" t="t" l="l"/>
+            <a:pathLst>
+              <a:path h="4108874" w="3280251">
+                <a:moveTo>
+                  <a:pt x="0" y="0"/>
+                </a:moveTo>
+                <a:lnTo>
+                  <a:pt x="3280250" y="0"/>
+                </a:lnTo>
+                <a:lnTo>
+                  <a:pt x="3280250" y="4108874"/>
+                </a:lnTo>
+                <a:lnTo>
+                  <a:pt x="0" y="4108874"/>
+                </a:lnTo>
+                <a:lnTo>
+                  <a:pt x="0" y="0"/>
+                </a:lnTo>
+                <a:close/>
+              </a:path>
+            </a:pathLst>
+          </a:custGeom>
+          <a:blipFill>
+            <a:blip r:embed="rId5"/>
+            <a:stretch>
+              <a:fillRect l="0" t="0" r="0" b="0"/>
+            </a:stretch>
+          </a:blipFill>
+        </p:spPr>
+      </p:sp>
+      <p:sp>
+        <p:nvSpPr>
+          <p:cNvPr name="Freeform 7" id="7"/>
+          <p:cNvSpPr/>
+          <p:nvPr/>
+        </p:nvSpPr>
+        <p:spPr>
+          <a:xfrm flipH="false" flipV="false" rot="3921125">
+            <a:off x="12766498" y="-1741514"/>
+            <a:ext cx="5550511" cy="5550511"/>
+          </a:xfrm>
+          <a:custGeom>
+            <a:avLst/>
+            <a:gdLst/>
+            <a:ahLst/>
+            <a:cxnLst/>
+            <a:rect r="r" b="b" t="t" l="l"/>
+            <a:pathLst>
+              <a:path h="5550511" w="5550511">
+                <a:moveTo>
+                  <a:pt x="0" y="0"/>
+                </a:moveTo>
+                <a:lnTo>
+                  <a:pt x="5550511" y="0"/>
+                </a:lnTo>
+                <a:lnTo>
+                  <a:pt x="5550511" y="5550511"/>
+                </a:lnTo>
+                <a:lnTo>
+                  <a:pt x="0" y="5550511"/>
+                </a:lnTo>
+                <a:lnTo>
+                  <a:pt x="0" y="0"/>
+                </a:lnTo>
+                <a:close/>
+              </a:path>
+            </a:pathLst>
+          </a:custGeom>
+          <a:blipFill>
+            <a:blip r:embed="rId6">
+              <a:extLst>
+                <a:ext uri="{96DAC541-7B7A-43D3-8B79-37D633B846F1}">
+                  <asvg:svgBlip xmlns:asvg="http://schemas.microsoft.com/office/drawing/2016/SVG/main" r:embed="rId7"/>
+                </a:ext>
+              </a:extLst>
+            </a:blip>
+            <a:stretch>
+              <a:fillRect l="0" t="0" r="0" b="0"/>
+            </a:stretch>
+          </a:blipFill>
+        </p:spPr>
+      </p:sp>
+      <p:sp>
+        <p:nvSpPr>
+          <p:cNvPr name="Freeform 8" id="8"/>
+          <p:cNvSpPr/>
+          <p:nvPr/>
+        </p:nvSpPr>
+        <p:spPr>
+          <a:xfrm flipH="false" flipV="false" rot="0">
+            <a:off x="0" y="-710214"/>
+            <a:ext cx="4581255" cy="4114800"/>
+          </a:xfrm>
+          <a:custGeom>
+            <a:avLst/>
+            <a:gdLst/>
+            <a:ahLst/>
+            <a:cxnLst/>
+            <a:rect r="r" b="b" t="t" l="l"/>
+            <a:pathLst>
+              <a:path h="4114800" w="4581255">
+                <a:moveTo>
+                  <a:pt x="0" y="0"/>
+                </a:moveTo>
+                <a:lnTo>
+                  <a:pt x="4581255" y="0"/>
+                </a:lnTo>
+                <a:lnTo>
+                  <a:pt x="4581255" y="4114800"/>
+                </a:lnTo>
+                <a:lnTo>
+                  <a:pt x="0" y="4114800"/>
+                </a:lnTo>
+                <a:lnTo>
+                  <a:pt x="0" y="0"/>
+                </a:lnTo>
+                <a:close/>
+              </a:path>
+            </a:pathLst>
+          </a:custGeom>
+          <a:blipFill>
+            <a:blip r:embed="rId8">
+              <a:extLst>
+                <a:ext uri="{96DAC541-7B7A-43D3-8B79-37D633B846F1}">
+                  <asvg:svgBlip xmlns:asvg="http://schemas.microsoft.com/office/drawing/2016/SVG/main" r:embed="rId9"/>
+                </a:ext>
+              </a:extLst>
+            </a:blip>
+            <a:stretch>
+              <a:fillRect l="0" t="0" r="0" b="0"/>
+            </a:stretch>
+          </a:blipFill>
+        </p:spPr>
+      </p:sp>
+      <p:sp>
+        <p:nvSpPr>
+          <p:cNvPr name="Freeform 9" id="9"/>
+          <p:cNvSpPr/>
+          <p:nvPr/>
+        </p:nvSpPr>
+        <p:spPr>
+          <a:xfrm flipH="false" flipV="false" rot="2571653">
+            <a:off x="-3050082" y="2465162"/>
+            <a:ext cx="4488785" cy="5378719"/>
+          </a:xfrm>
+          <a:custGeom>
+            <a:avLst/>
+            <a:gdLst/>
+            <a:ahLst/>
+            <a:cxnLst/>
+            <a:rect r="r" b="b" t="t" l="l"/>
+            <a:pathLst>
+              <a:path h="5378719" w="4488785">
+                <a:moveTo>
+                  <a:pt x="0" y="0"/>
+                </a:moveTo>
+                <a:lnTo>
+                  <a:pt x="4488786" y="0"/>
+                </a:lnTo>
+                <a:lnTo>
+                  <a:pt x="4488786" y="5378719"/>
+                </a:lnTo>
+                <a:lnTo>
+                  <a:pt x="0" y="5378719"/>
+                </a:lnTo>
+                <a:lnTo>
+                  <a:pt x="0" y="0"/>
+                </a:lnTo>
+                <a:close/>
+              </a:path>
+            </a:pathLst>
+          </a:custGeom>
+          <a:blipFill>
+            <a:blip r:embed="rId2">
+              <a:alphaModFix amt="21999"/>
+              <a:extLst>
+                <a:ext uri="{96DAC541-7B7A-43D3-8B79-37D633B846F1}">
+                  <asvg:svgBlip xmlns:asvg="http://schemas.microsoft.com/office/drawing/2016/SVG/main" r:embed="rId3"/>
+                </a:ext>
+              </a:extLst>
+            </a:blip>
+            <a:stretch>
+              <a:fillRect l="0" t="0" r="0" b="0"/>
+            </a:stretch>
+          </a:blipFill>
+        </p:spPr>
+      </p:sp>
+      <p:sp>
+        <p:nvSpPr>
+          <p:cNvPr name="Freeform 10" id="10"/>
+          <p:cNvSpPr/>
+          <p:nvPr/>
+        </p:nvSpPr>
+        <p:spPr>
+          <a:xfrm flipH="false" flipV="false" rot="0">
+            <a:off x="10166210" y="7892064"/>
+            <a:ext cx="4647276" cy="3099786"/>
+          </a:xfrm>
+          <a:custGeom>
+            <a:avLst/>
+            <a:gdLst/>
+            <a:ahLst/>
+            <a:cxnLst/>
+            <a:rect r="r" b="b" t="t" l="l"/>
+            <a:pathLst>
+              <a:path h="3099786" w="4647276">
+                <a:moveTo>
+                  <a:pt x="0" y="0"/>
+                </a:moveTo>
+                <a:lnTo>
+                  <a:pt x="4647276" y="0"/>
+                </a:lnTo>
+                <a:lnTo>
+                  <a:pt x="4647276" y="3099786"/>
+                </a:lnTo>
+                <a:lnTo>
+                  <a:pt x="0" y="3099786"/>
+                </a:lnTo>
+                <a:lnTo>
+                  <a:pt x="0" y="0"/>
+                </a:lnTo>
+                <a:close/>
+              </a:path>
+            </a:pathLst>
+          </a:custGeom>
+          <a:blipFill>
+            <a:blip r:embed="rId10">
+              <a:alphaModFix amt="43000"/>
+              <a:extLst>
+                <a:ext uri="{96DAC541-7B7A-43D3-8B79-37D633B846F1}">
+                  <asvg:svgBlip xmlns:asvg="http://schemas.microsoft.com/office/drawing/2016/SVG/main" r:embed="rId11"/>
+                </a:ext>
+              </a:extLst>
+            </a:blip>
+            <a:stretch>
+              <a:fillRect l="0" t="0" r="0" b="0"/>
+            </a:stretch>
+          </a:blipFill>
+        </p:spPr>
+      </p:sp>
+      <p:sp>
+        <p:nvSpPr>
+          <p:cNvPr name="Freeform 11" id="11"/>
+          <p:cNvSpPr/>
+          <p:nvPr/>
+        </p:nvSpPr>
+        <p:spPr>
+          <a:xfrm flipH="true" flipV="false" rot="0">
+            <a:off x="3281798" y="7892064"/>
+            <a:ext cx="4647276" cy="3099786"/>
+          </a:xfrm>
+          <a:custGeom>
+            <a:avLst/>
+            <a:gdLst/>
+            <a:ahLst/>
+            <a:cxnLst/>
+            <a:rect r="r" b="b" t="t" l="l"/>
+            <a:pathLst>
+              <a:path h="3099786" w="4647276">
+                <a:moveTo>
+                  <a:pt x="4647276" y="0"/>
+                </a:moveTo>
+                <a:lnTo>
+                  <a:pt x="0" y="0"/>
+                </a:lnTo>
+                <a:lnTo>
+                  <a:pt x="0" y="3099786"/>
+                </a:lnTo>
+                <a:lnTo>
+                  <a:pt x="4647276" y="3099786"/>
+                </a:lnTo>
+                <a:lnTo>
+                  <a:pt x="4647276" y="0"/>
+                </a:lnTo>
+                <a:close/>
+              </a:path>
+            </a:pathLst>
+          </a:custGeom>
+          <a:blipFill>
+            <a:blip r:embed="rId10">
+              <a:alphaModFix amt="43000"/>
+              <a:extLst>
+                <a:ext uri="{96DAC541-7B7A-43D3-8B79-37D633B846F1}">
+                  <asvg:svgBlip xmlns:asvg="http://schemas.microsoft.com/office/drawing/2016/SVG/main" r:embed="rId11"/>
+                </a:ext>
+              </a:extLst>
+            </a:blip>
+            <a:stretch>
+              <a:fillRect l="0" t="0" r="0" b="0"/>
+            </a:stretch>
+          </a:blipFill>
+        </p:spPr>
+      </p:sp>
+    </p:spTree>
+  </p:cSld>
+  <p:clrMapOvr>
+    <a:masterClrMapping/>
+  </p:clrMapOvr>
+</p:sld>
+</file>
+
+<file path=ppt/slides/slide14.xml><?xml version="1.0" encoding="utf-8"?>
 <p:sld xmlns:p="http://schemas.openxmlformats.org/presentationml/2006/main" xmlns:a="http://schemas.openxmlformats.org/drawingml/2006/main" xmlns:r="http://schemas.openxmlformats.org/officeDocument/2006/relationships">
   <p:cSld>
     <p:bg>
@@ -8648,7 +10336,7 @@
         </p:nvSpPr>
         <p:spPr>
           <a:xfrm rot="0">
-            <a:off x="5042471" y="971550"/>
+            <a:off x="5042471" y="542336"/>
             <a:ext cx="8203057" cy="1743049"/>
           </a:xfrm>
           <a:prstGeom prst="rect">
@@ -8676,144 +10364,14 @@
                 <a:cs typeface="Stinger Wide Bold"/>
                 <a:sym typeface="Stinger Wide Bold"/>
               </a:rPr>
-              <a:t>Conclusions and limitations</a:t>
+              <a:t>Results and evaluation</a:t>
             </a:r>
           </a:p>
         </p:txBody>
       </p:sp>
       <p:sp>
         <p:nvSpPr>
-          <p:cNvPr name="TextBox 3" id="3"/>
-          <p:cNvSpPr txBox="true"/>
-          <p:nvPr/>
-        </p:nvSpPr>
-        <p:spPr>
-          <a:xfrm rot="0">
-            <a:off x="3610498" y="2897333"/>
-            <a:ext cx="11067004" cy="4428653"/>
-          </a:xfrm>
-          <a:prstGeom prst="rect">
-            <a:avLst/>
-          </a:prstGeom>
-        </p:spPr>
-        <p:txBody>
-          <a:bodyPr anchor="t" rtlCol="false" tIns="0" lIns="0" bIns="0" rIns="0">
-            <a:spAutoFit/>
-          </a:bodyPr>
-          <a:lstStyle/>
-          <a:p>
-            <a:pPr algn="l" marL="489791" indent="-244895" lvl="1">
-              <a:lnSpc>
-                <a:spcPts val="3176"/>
-              </a:lnSpc>
-              <a:buFont typeface="Arial"/>
-              <a:buChar char="•"/>
-            </a:pPr>
-            <a:r>
-              <a:rPr lang="en-US" sz="2268" spc="24">
-                <a:solidFill>
-                  <a:srgbClr val="000000"/>
-                </a:solidFill>
-                <a:latin typeface="Codec Pro"/>
-                <a:ea typeface="Codec Pro"/>
-                <a:cs typeface="Codec Pro"/>
-                <a:sym typeface="Codec Pro"/>
-              </a:rPr>
-              <a:t>No Physic</a:t>
-            </a:r>
-            <a:r>
-              <a:rPr lang="en-US" sz="2268" spc="24">
-                <a:solidFill>
-                  <a:srgbClr val="000000"/>
-                </a:solidFill>
-                <a:latin typeface="Codec Pro"/>
-                <a:ea typeface="Codec Pro"/>
-                <a:cs typeface="Codec Pro"/>
-                <a:sym typeface="Codec Pro"/>
-              </a:rPr>
-              <a:t>al In</a:t>
-            </a:r>
-            <a:r>
-              <a:rPr lang="en-US" sz="2268" spc="24">
-                <a:solidFill>
-                  <a:srgbClr val="000000"/>
-                </a:solidFill>
-                <a:latin typeface="Codec Pro"/>
-                <a:ea typeface="Codec Pro"/>
-                <a:cs typeface="Codec Pro"/>
-                <a:sym typeface="Codec Pro"/>
-              </a:rPr>
-              <a:t>teraction (Collision): The current model does not prevent self-collision if the finger is bent excessively.</a:t>
-            </a:r>
-          </a:p>
-          <a:p>
-            <a:pPr algn="l" marL="489791" indent="-244895" lvl="1">
-              <a:lnSpc>
-                <a:spcPts val="3176"/>
-              </a:lnSpc>
-              <a:buFont typeface="Arial"/>
-              <a:buChar char="•"/>
-            </a:pPr>
-            <a:r>
-              <a:rPr lang="en-US" sz="2268" spc="24">
-                <a:solidFill>
-                  <a:srgbClr val="000000"/>
-                </a:solidFill>
-                <a:latin typeface="Codec Pro"/>
-                <a:ea typeface="Codec Pro"/>
-                <a:cs typeface="Codec Pro"/>
-                <a:sym typeface="Codec Pro"/>
-              </a:rPr>
-              <a:t>Cable Simplification: The cable is simulated ideally, ignoring friction between the cable and the internal cavities of the finger wall.</a:t>
-            </a:r>
-          </a:p>
-          <a:p>
-            <a:pPr algn="l" marL="489791" indent="-244895" lvl="1">
-              <a:lnSpc>
-                <a:spcPts val="3176"/>
-              </a:lnSpc>
-              <a:buFont typeface="Arial"/>
-              <a:buChar char="•"/>
-            </a:pPr>
-            <a:r>
-              <a:rPr lang="en-US" sz="2268" spc="24">
-                <a:solidFill>
-                  <a:srgbClr val="000000"/>
-                </a:solidFill>
-                <a:latin typeface="Codec Pro"/>
-                <a:ea typeface="Codec Pro"/>
-                <a:cs typeface="Codec Pro"/>
-                <a:sym typeface="Codec Pro"/>
-              </a:rPr>
-              <a:t>Design Constraints: The finger is a solid block, lacking the bellows structure commonly seen in reality to optimize the bending angle.</a:t>
-            </a:r>
-          </a:p>
-          <a:p>
-            <a:pPr algn="l" marL="489791" indent="-244895" lvl="1">
-              <a:lnSpc>
-                <a:spcPts val="3176"/>
-              </a:lnSpc>
-              <a:buFont typeface="Arial"/>
-              <a:buChar char="•"/>
-            </a:pPr>
-            <a:r>
-              <a:rPr lang="en-US" sz="2268" spc="24">
-                <a:solidFill>
-                  <a:srgbClr val="000000"/>
-                </a:solidFill>
-                <a:latin typeface="Codec Pro"/>
-                <a:ea typeface="Codec Pro"/>
-                <a:cs typeface="Codec Pro"/>
-                <a:sym typeface="Codec Pro"/>
-              </a:rPr>
-              <a:t>Ideal Actuation Assumptions: The simulation assumes an idealized cable pull with instantaneous response and infinite force. It does not account for the electromechanical constraints of a real actuator system, such as motor torque limits, inertia, or signal delays within the physical control loop.</a:t>
-            </a:r>
-          </a:p>
-        </p:txBody>
-      </p:sp>
-      <p:sp>
-        <p:nvSpPr>
-          <p:cNvPr name="Freeform 4" id="4"/>
+          <p:cNvPr name="Freeform 3" id="3"/>
           <p:cNvSpPr/>
           <p:nvPr/>
         </p:nvSpPr>
@@ -8866,7 +10424,7 @@
       </p:sp>
       <p:sp>
         <p:nvSpPr>
-          <p:cNvPr name="Freeform 5" id="5"/>
+          <p:cNvPr name="Freeform 4" id="4"/>
           <p:cNvSpPr/>
           <p:nvPr/>
         </p:nvSpPr>
@@ -8912,7 +10470,7 @@
       </p:sp>
       <p:sp>
         <p:nvSpPr>
-          <p:cNvPr name="Freeform 6" id="6"/>
+          <p:cNvPr name="Freeform 5" id="5"/>
           <p:cNvSpPr/>
           <p:nvPr/>
         </p:nvSpPr>
@@ -8958,7 +10516,7 @@
       </p:sp>
       <p:sp>
         <p:nvSpPr>
-          <p:cNvPr name="Freeform 7" id="7"/>
+          <p:cNvPr name="Freeform 6" id="6"/>
           <p:cNvSpPr/>
           <p:nvPr/>
         </p:nvSpPr>
@@ -9010,7 +10568,7 @@
       </p:sp>
       <p:sp>
         <p:nvSpPr>
-          <p:cNvPr name="Freeform 8" id="8"/>
+          <p:cNvPr name="Freeform 7" id="7"/>
           <p:cNvSpPr/>
           <p:nvPr/>
         </p:nvSpPr>
@@ -9062,7 +10620,7 @@
       </p:sp>
       <p:sp>
         <p:nvSpPr>
-          <p:cNvPr name="Freeform 9" id="9"/>
+          <p:cNvPr name="Freeform 8" id="8"/>
           <p:cNvSpPr/>
           <p:nvPr/>
         </p:nvSpPr>
@@ -9115,7 +10673,7 @@
       </p:sp>
       <p:sp>
         <p:nvSpPr>
-          <p:cNvPr name="Freeform 10" id="10"/>
+          <p:cNvPr name="Freeform 9" id="9"/>
           <p:cNvSpPr/>
           <p:nvPr/>
         </p:nvSpPr>
@@ -9168,7 +10726,7 @@
       </p:sp>
       <p:sp>
         <p:nvSpPr>
-          <p:cNvPr name="Freeform 11" id="11"/>
+          <p:cNvPr name="Freeform 10" id="10"/>
           <p:cNvSpPr/>
           <p:nvPr/>
         </p:nvSpPr>
@@ -9219,11 +10777,67 @@
           </a:blipFill>
         </p:spPr>
       </p:sp>
+      <p:pic>
+        <p:nvPicPr>
+          <p:cNvPr name="Picture 11" id="11">
+            <a:hlinkClick action="ppaction://media"/>
+          </p:cNvPr>
+          <p:cNvPicPr>
+            <a:picLocks noChangeAspect="true"/>
+          </p:cNvPicPr>
+          <p:nvPr>
+            <a:videoFile r:link="rId13"/>
+            <p:extLst>
+              <p:ext uri="{DAA4B4D4-6D71-4841-9C94-3DE7FCFB9230}">
+                <p14:media xmlns:p14="http://schemas.microsoft.com/office/powerpoint/2010/main" r:embed="rId14"/>
+              </p:ext>
+            </p:extLst>
+          </p:nvPr>
+        </p:nvPicPr>
+        <p:blipFill>
+          <a:blip r:embed="rId12"/>
+          <a:srcRect l="0" t="0" r="0" b="0"/>
+          <a:stretch>
+            <a:fillRect/>
+          </a:stretch>
+        </p:blipFill>
+        <p:spPr>
+          <a:xfrm flipH="false" flipV="false" rot="0">
+            <a:off x="4372107" y="2746822"/>
+            <a:ext cx="9543786" cy="3933421"/>
+          </a:xfrm>
+          <a:prstGeom prst="rect">
+            <a:avLst/>
+          </a:prstGeom>
+        </p:spPr>
+      </p:pic>
     </p:spTree>
   </p:cSld>
   <p:clrMapOvr>
     <a:masterClrMapping/>
   </p:clrMapOvr>
+  <p:timing>
+    <p:tnLst>
+      <p:par>
+        <p:cTn dur="indefinite" restart="never" nodeType="tmRoot">
+          <p:childTnLst>
+            <p:video>
+              <p:cMediaNode vol="100000">
+                <p:cTn fill="hold" display="false">
+                  <p:stCondLst>
+                    <p:cond delay="indefinite"/>
+                  </p:stCondLst>
+                </p:cTn>
+                <p:tgtEl>
+                  <p:spTgt spid="11"/>
+                </p:tgtEl>
+              </p:cMediaNode>
+            </p:video>
+          </p:childTnLst>
+        </p:cTn>
+      </p:par>
+    </p:tnLst>
+  </p:timing>
 </p:sld>
 </file>
 
